--- a/docs/docs-inator.pptx
+++ b/docs/docs-inator.pptx
@@ -6218,7 +6218,7 @@
                 <a:ea typeface="Calibri" pitchFamily="34" charset="-122"/>
                 <a:cs typeface="Calibri" pitchFamily="34" charset="-120"/>
               </a:rPr>
-              <a:t>Per-tenant LLM configuration</a:t>
+              <a:t>Per-tenant LLM &amp; S3 configuration</a:t>
             </a:r>
             <a:endParaRPr lang="en-US" sz="1100" dirty="0"/>
           </a:p>
